--- a/dist/weeks-1학기/서비스디자인_1학기_02주차_리서치설계.pptx
+++ b/dist/weeks-1학기/서비스디자인_1학기_02주차_리서치설계.pptx
@@ -13452,7 +13452,7 @@
               <a:buNone/>
             </a:pPr>
             <a:r>
-              <a:rPr lang="en-US" sz="1150" dirty="0">
+              <a:rPr lang="en-US" sz="1050" dirty="0">
                 <a:solidFill>
                   <a:srgbClr val="6E6E6E"/>
                 </a:solidFill>
@@ -13462,7 +13462,7 @@
               </a:rPr>
               <a:t>당사자를 실제로 만날 수 있는가. 3주차에 인터뷰를 해야 합니다.</a:t>
             </a:r>
-            <a:endParaRPr lang="en-US" sz="1150" dirty="0"/>
+            <a:endParaRPr lang="en-US" sz="1050" dirty="0"/>
           </a:p>
         </p:txBody>
       </p:sp>
@@ -13625,7 +13625,7 @@
               <a:buNone/>
             </a:pPr>
             <a:r>
-              <a:rPr lang="en-US" sz="1150" dirty="0">
+              <a:rPr lang="en-US" sz="1050" dirty="0">
                 <a:solidFill>
                   <a:srgbClr val="6E6E6E"/>
                 </a:solidFill>
@@ -13635,7 +13635,7 @@
               </a:rPr>
               <a:t>그 상황을 내가 직접 볼 수 있는가. 말로만 듣는 주제는 깊이가 얕아집니다.</a:t>
             </a:r>
-            <a:endParaRPr lang="en-US" sz="1150" dirty="0"/>
+            <a:endParaRPr lang="en-US" sz="1050" dirty="0"/>
           </a:p>
         </p:txBody>
       </p:sp>
@@ -13798,7 +13798,7 @@
               <a:buNone/>
             </a:pPr>
             <a:r>
-              <a:rPr lang="en-US" sz="1150" dirty="0">
+              <a:rPr lang="en-US" sz="1050" dirty="0">
                 <a:solidFill>
                   <a:srgbClr val="6E6E6E"/>
                 </a:solidFill>
@@ -13808,7 +13808,7 @@
               </a:rPr>
               <a:t>15주 안에 한 바퀴 돌 수 있는 크기인가. '고령화 문제'는 주제가 아닙니다.</a:t>
             </a:r>
-            <a:endParaRPr lang="en-US" sz="1150" dirty="0"/>
+            <a:endParaRPr lang="en-US" sz="1050" dirty="0"/>
           </a:p>
         </p:txBody>
       </p:sp>
@@ -13971,7 +13971,7 @@
               <a:buNone/>
             </a:pPr>
             <a:r>
-              <a:rPr lang="en-US" sz="1150" dirty="0">
+              <a:rPr lang="en-US" sz="1050" dirty="0">
                 <a:solidFill>
                   <a:srgbClr val="6E6E6E"/>
                 </a:solidFill>
@@ -13981,7 +13981,7 @@
               </a:rPr>
               <a:t>4개월 동안 질리지 않을 만큼 궁금한가. 남이 좋다고 한 주제는 대개 중간에 식습니다.</a:t>
             </a:r>
-            <a:endParaRPr lang="en-US" sz="1150" dirty="0"/>
+            <a:endParaRPr lang="en-US" sz="1050" dirty="0"/>
           </a:p>
         </p:txBody>
       </p:sp>
@@ -16279,7 +16279,7 @@
               <a:buNone/>
             </a:pPr>
             <a:r>
-              <a:rPr lang="en-US" sz="1150" dirty="0">
+              <a:rPr lang="en-US" sz="1050" dirty="0">
                 <a:solidFill>
                   <a:srgbClr val="6E6E6E"/>
                 </a:solidFill>
@@ -16289,7 +16289,7 @@
               </a:rPr>
               <a:t>무엇을 알아야 하는지 질문 목록을 먼저 씁니다. 질문 없이 검색하면 자료만 쌓입니다.</a:t>
             </a:r>
-            <a:endParaRPr lang="en-US" sz="1150" dirty="0"/>
+            <a:endParaRPr lang="en-US" sz="1050" dirty="0"/>
           </a:p>
         </p:txBody>
       </p:sp>
@@ -16452,7 +16452,7 @@
               <a:buNone/>
             </a:pPr>
             <a:r>
-              <a:rPr lang="en-US" sz="1150" dirty="0">
+              <a:rPr lang="en-US" sz="1050" dirty="0">
                 <a:solidFill>
                   <a:srgbClr val="6E6E6E"/>
                 </a:solidFill>
@@ -16462,7 +16462,7 @@
               </a:rPr>
               <a:t>네 갈래로 나눠 모읍니다. 시장 / 정책 · 제도 / 경쟁 서비스 / 선행연구. 출처와 날짜를 함께.</a:t>
             </a:r>
-            <a:endParaRPr lang="en-US" sz="1150" dirty="0"/>
+            <a:endParaRPr lang="en-US" sz="1050" dirty="0"/>
           </a:p>
         </p:txBody>
       </p:sp>
@@ -16625,7 +16625,7 @@
               <a:buNone/>
             </a:pPr>
             <a:r>
-              <a:rPr lang="en-US" sz="1150" dirty="0">
+              <a:rPr lang="en-US" sz="1050" dirty="0">
                 <a:solidFill>
                   <a:srgbClr val="6E6E6E"/>
                 </a:solidFill>
@@ -16635,7 +16635,7 @@
               </a:rPr>
               <a:t>모은 것을 질문별로 다시 배치합니다. 답이 있는 질문과 없는 질문이 갈립니다.</a:t>
             </a:r>
-            <a:endParaRPr lang="en-US" sz="1150" dirty="0"/>
+            <a:endParaRPr lang="en-US" sz="1050" dirty="0"/>
           </a:p>
         </p:txBody>
       </p:sp>
@@ -16798,7 +16798,7 @@
               <a:buNone/>
             </a:pPr>
             <a:r>
-              <a:rPr lang="en-US" sz="1150" dirty="0">
+              <a:rPr lang="en-US" sz="1050" dirty="0">
                 <a:solidFill>
                   <a:srgbClr val="B8B8B8"/>
                 </a:solidFill>
@@ -16808,7 +16808,7 @@
               </a:rPr>
               <a:t>답이 없는 질문이 현장에서 물어볼 것입니다. 이것이 3주차 인터뷰 가이드의 뼈대가 됩니다.</a:t>
             </a:r>
-            <a:endParaRPr lang="en-US" sz="1150" dirty="0"/>
+            <a:endParaRPr lang="en-US" sz="1050" dirty="0"/>
           </a:p>
         </p:txBody>
       </p:sp>
@@ -17432,7 +17432,7 @@
               <a:buNone/>
             </a:pPr>
             <a:r>
-              <a:rPr lang="en-US" sz="1150" dirty="0">
+              <a:rPr lang="en-US" sz="1050" dirty="0">
                 <a:solidFill>
                   <a:srgbClr val="6E6E6E"/>
                 </a:solidFill>
@@ -17442,7 +17442,7 @@
               </a:rPr>
               <a:t>통계청 · 정부 부처 통계, 산업 협회 자료, 언론 보도.</a:t>
             </a:r>
-            <a:endParaRPr lang="en-US" sz="1150" dirty="0"/>
+            <a:endParaRPr lang="en-US" sz="1050" dirty="0"/>
           </a:p>
           <a:p>
             <a:pPr indent="0" marL="0">
@@ -17452,7 +17452,7 @@
               <a:buNone/>
             </a:pPr>
             <a:r>
-              <a:rPr lang="en-US" sz="1150" dirty="0">
+              <a:rPr lang="en-US" sz="1050" dirty="0">
                 <a:solidFill>
                   <a:srgbClr val="6E6E6E"/>
                 </a:solidFill>
@@ -17462,7 +17462,7 @@
               </a:rPr>
               <a:t>확인할 것 — 이 문제를 겪는 사람이 얼마나 되는가, 늘고 있는가 줄고 있는가.</a:t>
             </a:r>
-            <a:endParaRPr lang="en-US" sz="1150" dirty="0"/>
+            <a:endParaRPr lang="en-US" sz="1050" dirty="0"/>
           </a:p>
         </p:txBody>
       </p:sp>
@@ -17625,7 +17625,7 @@
               <a:buNone/>
             </a:pPr>
             <a:r>
-              <a:rPr lang="en-US" sz="1150" dirty="0">
+              <a:rPr lang="en-US" sz="1050" dirty="0">
                 <a:solidFill>
                   <a:srgbClr val="6E6E6E"/>
                 </a:solidFill>
@@ -17635,7 +17635,7 @@
               </a:rPr>
               <a:t>관련 부처 고시, 지자체 조례, 서비스 약관.</a:t>
             </a:r>
-            <a:endParaRPr lang="en-US" sz="1150" dirty="0"/>
+            <a:endParaRPr lang="en-US" sz="1050" dirty="0"/>
           </a:p>
           <a:p>
             <a:pPr indent="0" marL="0">
@@ -17645,7 +17645,7 @@
               <a:buNone/>
             </a:pPr>
             <a:r>
-              <a:rPr lang="en-US" sz="1150" dirty="0">
+              <a:rPr lang="en-US" sz="1050" dirty="0">
                 <a:solidFill>
                   <a:srgbClr val="6E6E6E"/>
                 </a:solidFill>
@@ -17655,7 +17655,7 @@
               </a:rPr>
               <a:t>확인할 것 — 디자인으로 바꿀 수 있는 부분과 없는 부분의 경계.</a:t>
             </a:r>
-            <a:endParaRPr lang="en-US" sz="1150" dirty="0"/>
+            <a:endParaRPr lang="en-US" sz="1050" dirty="0"/>
           </a:p>
         </p:txBody>
       </p:sp>
@@ -17818,7 +17818,7 @@
               <a:buNone/>
             </a:pPr>
             <a:r>
-              <a:rPr lang="en-US" sz="1150" dirty="0">
+              <a:rPr lang="en-US" sz="1050" dirty="0">
                 <a:solidFill>
                   <a:srgbClr val="6E6E6E"/>
                 </a:solidFill>
@@ -17828,7 +17828,7 @@
               </a:rPr>
               <a:t>국내외 앱 · 서비스, 공공 시범사업, 스타트업.</a:t>
             </a:r>
-            <a:endParaRPr lang="en-US" sz="1150" dirty="0"/>
+            <a:endParaRPr lang="en-US" sz="1050" dirty="0"/>
           </a:p>
           <a:p>
             <a:pPr indent="0" marL="0">
@@ -17838,7 +17838,7 @@
               <a:buNone/>
             </a:pPr>
             <a:r>
-              <a:rPr lang="en-US" sz="1150" dirty="0">
+              <a:rPr lang="en-US" sz="1050" dirty="0">
                 <a:solidFill>
                   <a:srgbClr val="6E6E6E"/>
                 </a:solidFill>
@@ -17848,7 +17848,7 @@
               </a:rPr>
               <a:t>확인할 것 — 왜 그것으로 충분하지 않은가. 이 답이 여러분의 차별점입니다.</a:t>
             </a:r>
-            <a:endParaRPr lang="en-US" sz="1150" dirty="0"/>
+            <a:endParaRPr lang="en-US" sz="1050" dirty="0"/>
           </a:p>
         </p:txBody>
       </p:sp>
@@ -18011,7 +18011,7 @@
               <a:buNone/>
             </a:pPr>
             <a:r>
-              <a:rPr lang="en-US" sz="1150" dirty="0">
+              <a:rPr lang="en-US" sz="1050" dirty="0">
                 <a:solidFill>
                   <a:srgbClr val="6E6E6E"/>
                 </a:solidFill>
@@ -18021,7 +18021,7 @@
               </a:rPr>
               <a:t>RISS · DBpia · Google Scholar.</a:t>
             </a:r>
-            <a:endParaRPr lang="en-US" sz="1150" dirty="0"/>
+            <a:endParaRPr lang="en-US" sz="1050" dirty="0"/>
           </a:p>
           <a:p>
             <a:pPr indent="0" marL="0">
@@ -18031,7 +18031,7 @@
               <a:buNone/>
             </a:pPr>
             <a:r>
-              <a:rPr lang="en-US" sz="1150" dirty="0">
+              <a:rPr lang="en-US" sz="1050" dirty="0">
                 <a:solidFill>
                   <a:srgbClr val="6E6E6E"/>
                 </a:solidFill>
@@ -18041,7 +18041,7 @@
               </a:rPr>
               <a:t>확인할 것 — 이 문제의 원인에 대해 이미 검증된 설명이 있는가.</a:t>
             </a:r>
-            <a:endParaRPr lang="en-US" sz="1150" dirty="0"/>
+            <a:endParaRPr lang="en-US" sz="1050" dirty="0"/>
           </a:p>
         </p:txBody>
       </p:sp>
